--- a/dist/초3/수학/도형과측정/초3_수학_도형과측정_02_직각과직사각형·정사각형.pptx
+++ b/dist/초3/수학/도형과측정/초3_수학_도형과측정_02_직각과직사각형·정사각형.pptx
@@ -120,13 +120,13 @@
   <p:extLst>
     <p:ext uri="{521415D9-36F7-43E2-AB2F-B90AF26B5E84}">
       <p14:sectionLst xmlns:p14="http://schemas.microsoft.com/office/powerpoint/2010/main">
-        <p14:section name="도입" id="{9942e7ad-7fbd-d542-3b46-1e37ef56c37b}">
+        <p14:section name="도입" id="{80fc6701-af01-4166-5c2b-a976edae8532}">
           <p14:sldIdLst>
             <p14:sldId id="256"/>
             <p14:sldId id="257"/>
           </p14:sldIdLst>
         </p14:section>
-        <p14:section name="개념" id="{5a99585c-8582-d432-5e80-a2c37156e333}">
+        <p14:section name="개념" id="{b7363c04-3ff5-8bbe-bfa6-5c580af4215f}">
           <p14:sldIdLst>
             <p14:sldId id="258"/>
             <p14:sldId id="259"/>
@@ -134,32 +134,32 @@
             <p14:sldId id="262"/>
           </p14:sldIdLst>
         </p14:section>
-        <p14:section name="연습" id="{272ae053-34be-aa0a-dd0b-76741f2c36f5}">
+        <p14:section name="연습" id="{da05df50-e9eb-b93e-7ce2-863528c28e70}">
           <p14:sldIdLst>
             <p14:sldId id="260"/>
             <p14:sldId id="263"/>
             <p14:sldId id="264"/>
           </p14:sldIdLst>
         </p14:section>
-        <p14:section name="개념" id="{936dfca8-6dd5-9aac-0dd4-1bbfff7f9993}">
+        <p14:section name="개념" id="{c644c7ae-b68a-397d-f9c3-b1b2ea8671a0}">
           <p14:sldIdLst/>
         </p14:section>
-        <p14:section name="연습" id="{379ac77d-e014-f6ff-b8d0-60622c36cede}">
+        <p14:section name="연습" id="{c11e9712-f59e-dccb-4548-58331e44b563}">
           <p14:sldIdLst/>
         </p14:section>
-        <p14:section name="확인" id="{a086486d-31f8-4e78-22e4-615007367fee}">
+        <p14:section name="확인" id="{a701b4c3-66cb-73e5-6778-bcc8d52a1163}">
           <p14:sldIdLst>
             <p14:sldId id="265"/>
             <p14:sldId id="266"/>
             <p14:sldId id="267"/>
           </p14:sldIdLst>
         </p14:section>
-        <p14:section name="정리" id="{26787d73-22fb-4b57-9936-8a912c43e360}">
+        <p14:section name="정리" id="{f8de14a9-1ea6-de9c-ac48-c4a1dba951b4}">
           <p14:sldIdLst>
             <p14:sldId id="268"/>
           </p14:sldIdLst>
         </p14:section>
-        <p14:section name="보충" id="{2a57f57f-7d63-a0f1-69a6-2df62432bea7}">
+        <p14:section name="보충" id="{062cb316-63e7-e51f-cf8d-718c6c628db0}">
           <p14:sldIdLst>
             <p14:sldId id="269"/>
           </p14:sldIdLst>
@@ -6931,8 +6931,8 @@
         </p:nvSpPr>
         <p:spPr>
           <a:xfrm>
-            <a:off x="3367877" y="2601240"/>
-            <a:ext cx="408432" cy="381000"/>
+            <a:off x="3318093" y="2537740"/>
+            <a:ext cx="508000" cy="508000"/>
           </a:xfrm>
           <a:prstGeom prst="rect">
             <a:avLst/>
@@ -6948,7 +6948,7 @@
               <a:buNone/>
             </a:pPr>
             <a:r>
-              <a:rPr lang="ko-KR" altLang="en-US" sz="2400" b="1" dirty="0">
+              <a:rPr lang="ko-KR" altLang="en-US" sz="3200" b="1" dirty="0">
                 <a:solidFill>
                   <a:srgbClr val="1F2937"/>
                 </a:solidFill>
@@ -6958,7 +6958,7 @@
               </a:rPr>
               <a:t>ㄱ</a:t>
             </a:r>
-            <a:endParaRPr lang="ko-KR" sz="2400" dirty="0"/>
+            <a:endParaRPr lang="ko-KR" sz="3200" dirty="0"/>
           </a:p>
         </p:txBody>
       </p:sp>
@@ -6970,8 +6970,8 @@
         </p:nvSpPr>
         <p:spPr>
           <a:xfrm>
-            <a:off x="1438004" y="5160216"/>
-            <a:ext cx="408432" cy="381000"/>
+            <a:off x="1388220" y="5096716"/>
+            <a:ext cx="508000" cy="508000"/>
           </a:xfrm>
           <a:prstGeom prst="rect">
             <a:avLst/>
@@ -6987,7 +6987,7 @@
               <a:buNone/>
             </a:pPr>
             <a:r>
-              <a:rPr lang="ko-KR" altLang="en-US" sz="2400" b="1" dirty="0">
+              <a:rPr lang="ko-KR" altLang="en-US" sz="3200" b="1" dirty="0">
                 <a:solidFill>
                   <a:srgbClr val="1F2937"/>
                 </a:solidFill>
@@ -6997,7 +6997,7 @@
               </a:rPr>
               <a:t>ㄴ</a:t>
             </a:r>
-            <a:endParaRPr lang="ko-KR" sz="2400" dirty="0"/>
+            <a:endParaRPr lang="ko-KR" sz="3200" dirty="0"/>
           </a:p>
         </p:txBody>
       </p:sp>
@@ -7009,8 +7009,8 @@
         </p:nvSpPr>
         <p:spPr>
           <a:xfrm>
-            <a:off x="4641342" y="5047640"/>
-            <a:ext cx="408432" cy="381000"/>
+            <a:off x="4591558" y="4984140"/>
+            <a:ext cx="508000" cy="508000"/>
           </a:xfrm>
           <a:prstGeom prst="rect">
             <a:avLst/>
@@ -7026,7 +7026,7 @@
               <a:buNone/>
             </a:pPr>
             <a:r>
-              <a:rPr lang="ko-KR" altLang="en-US" sz="2400" b="1" dirty="0">
+              <a:rPr lang="ko-KR" altLang="en-US" sz="3200" b="1" dirty="0">
                 <a:solidFill>
                   <a:srgbClr val="1F2937"/>
                 </a:solidFill>
@@ -7036,7 +7036,7 @@
               </a:rPr>
               <a:t>ㄷ</a:t>
             </a:r>
-            <a:endParaRPr lang="ko-KR" sz="2400" dirty="0"/>
+            <a:endParaRPr lang="ko-KR" sz="3200" dirty="0"/>
           </a:p>
         </p:txBody>
       </p:sp>
@@ -7528,8 +7528,8 @@
         </p:nvSpPr>
         <p:spPr>
           <a:xfrm>
-            <a:off x="8673904" y="2626156"/>
-            <a:ext cx="408432" cy="381000"/>
+            <a:off x="8624120" y="2562656"/>
+            <a:ext cx="508000" cy="508000"/>
           </a:xfrm>
           <a:prstGeom prst="rect">
             <a:avLst/>
@@ -7545,7 +7545,7 @@
               <a:buNone/>
             </a:pPr>
             <a:r>
-              <a:rPr lang="ko-KR" altLang="en-US" sz="2400" b="1" dirty="0">
+              <a:rPr lang="ko-KR" altLang="en-US" sz="3200" b="1" dirty="0">
                 <a:solidFill>
                   <a:srgbClr val="1F2937"/>
                 </a:solidFill>
@@ -7555,7 +7555,7 @@
               </a:rPr>
               <a:t>ㄹ</a:t>
             </a:r>
-            <a:endParaRPr lang="ko-KR" sz="2400" dirty="0"/>
+            <a:endParaRPr lang="ko-KR" sz="3200" dirty="0"/>
           </a:p>
         </p:txBody>
       </p:sp>
@@ -7567,8 +7567,8 @@
         </p:nvSpPr>
         <p:spPr>
           <a:xfrm>
-            <a:off x="7360237" y="5132465"/>
-            <a:ext cx="408432" cy="381000"/>
+            <a:off x="7310453" y="5068965"/>
+            <a:ext cx="508000" cy="508000"/>
           </a:xfrm>
           <a:prstGeom prst="rect">
             <a:avLst/>
@@ -7584,7 +7584,7 @@
               <a:buNone/>
             </a:pPr>
             <a:r>
-              <a:rPr lang="ko-KR" altLang="en-US" sz="2400" b="1" dirty="0">
+              <a:rPr lang="ko-KR" altLang="en-US" sz="3200" b="1" dirty="0">
                 <a:solidFill>
                   <a:srgbClr val="1F2937"/>
                 </a:solidFill>
@@ -7594,7 +7594,7 @@
               </a:rPr>
               <a:t>ㅁ</a:t>
             </a:r>
-            <a:endParaRPr lang="ko-KR" sz="2400" dirty="0"/>
+            <a:endParaRPr lang="ko-KR" sz="3200" dirty="0"/>
           </a:p>
         </p:txBody>
       </p:sp>
@@ -7606,8 +7606,8 @@
         </p:nvSpPr>
         <p:spPr>
           <a:xfrm>
-            <a:off x="10187178" y="5001463"/>
-            <a:ext cx="408432" cy="381000"/>
+            <a:off x="10137394" y="4937963"/>
+            <a:ext cx="508000" cy="508000"/>
           </a:xfrm>
           <a:prstGeom prst="rect">
             <a:avLst/>
@@ -7623,7 +7623,7 @@
               <a:buNone/>
             </a:pPr>
             <a:r>
-              <a:rPr lang="ko-KR" altLang="en-US" sz="2400" b="1" dirty="0">
+              <a:rPr lang="ko-KR" altLang="en-US" sz="3200" b="1" dirty="0">
                 <a:solidFill>
                   <a:srgbClr val="1F2937"/>
                 </a:solidFill>
@@ -7633,7 +7633,7 @@
               </a:rPr>
               <a:t>ㅂ</a:t>
             </a:r>
-            <a:endParaRPr lang="ko-KR" sz="2400" dirty="0"/>
+            <a:endParaRPr lang="ko-KR" sz="3200" dirty="0"/>
           </a:p>
         </p:txBody>
       </p:sp>
@@ -8755,8 +8755,8 @@
         </p:nvSpPr>
         <p:spPr>
           <a:xfrm>
-            <a:off x="1654302" y="2308860"/>
-            <a:ext cx="408432" cy="381000"/>
+            <a:off x="1604518" y="2245360"/>
+            <a:ext cx="508000" cy="508000"/>
           </a:xfrm>
           <a:prstGeom prst="rect">
             <a:avLst/>
@@ -8772,7 +8772,7 @@
               <a:buNone/>
             </a:pPr>
             <a:r>
-              <a:rPr lang="ko-KR" altLang="en-US" sz="2400" b="1" dirty="0">
+              <a:rPr lang="ko-KR" altLang="en-US" sz="3200" b="1" dirty="0">
                 <a:solidFill>
                   <a:srgbClr val="1F2937"/>
                 </a:solidFill>
@@ -8782,7 +8782,7 @@
               </a:rPr>
               <a:t>ㄱ</a:t>
             </a:r>
-            <a:endParaRPr lang="ko-KR" sz="2400" dirty="0"/>
+            <a:endParaRPr lang="ko-KR" sz="3200" dirty="0"/>
           </a:p>
         </p:txBody>
       </p:sp>
@@ -8794,8 +8794,8 @@
         </p:nvSpPr>
         <p:spPr>
           <a:xfrm>
-            <a:off x="1481881" y="5468321"/>
-            <a:ext cx="408432" cy="381000"/>
+            <a:off x="1432097" y="5404821"/>
+            <a:ext cx="508000" cy="508000"/>
           </a:xfrm>
           <a:prstGeom prst="rect">
             <a:avLst/>
@@ -8811,7 +8811,7 @@
               <a:buNone/>
             </a:pPr>
             <a:r>
-              <a:rPr lang="ko-KR" altLang="en-US" sz="2400" b="1" dirty="0">
+              <a:rPr lang="ko-KR" altLang="en-US" sz="3200" b="1" dirty="0">
                 <a:solidFill>
                   <a:srgbClr val="1F2937"/>
                 </a:solidFill>
@@ -8821,7 +8821,7 @@
               </a:rPr>
               <a:t>ㄴ</a:t>
             </a:r>
-            <a:endParaRPr lang="ko-KR" sz="2400" dirty="0"/>
+            <a:endParaRPr lang="ko-KR" sz="3200" dirty="0"/>
           </a:p>
         </p:txBody>
       </p:sp>
@@ -8833,8 +8833,8 @@
         </p:nvSpPr>
         <p:spPr>
           <a:xfrm>
-            <a:off x="4641342" y="5295900"/>
-            <a:ext cx="408432" cy="381000"/>
+            <a:off x="4591558" y="5232400"/>
+            <a:ext cx="508000" cy="508000"/>
           </a:xfrm>
           <a:prstGeom prst="rect">
             <a:avLst/>
@@ -8850,7 +8850,7 @@
               <a:buNone/>
             </a:pPr>
             <a:r>
-              <a:rPr lang="ko-KR" altLang="en-US" sz="2400" b="1" dirty="0">
+              <a:rPr lang="ko-KR" altLang="en-US" sz="3200" b="1" dirty="0">
                 <a:solidFill>
                   <a:srgbClr val="1F2937"/>
                 </a:solidFill>
@@ -8860,7 +8860,7 @@
               </a:rPr>
               <a:t>ㄷ</a:t>
             </a:r>
-            <a:endParaRPr lang="ko-KR" sz="2400" dirty="0"/>
+            <a:endParaRPr lang="ko-KR" sz="3200" dirty="0"/>
           </a:p>
         </p:txBody>
       </p:sp>
@@ -10406,8 +10406,8 @@
         </p:nvSpPr>
         <p:spPr>
           <a:xfrm>
-            <a:off x="1036320" y="4032533"/>
-            <a:ext cx="2193798" cy="1096899"/>
+            <a:off x="914400" y="4027961"/>
+            <a:ext cx="2315718" cy="1157859"/>
           </a:xfrm>
           <a:custGeom>
             <a:avLst/>
@@ -10416,15 +10416,15 @@
             <a:cxnLst/>
             <a:rect l="l" t="t" r="r" b="b"/>
             <a:pathLst>
-              <a:path w="2193798" h="1096899">
+              <a:path w="2315718" h="1157859">
                 <a:moveTo>
-                  <a:pt x="0" y="1096899"/>
+                  <a:pt x="0" y="1157859"/>
                 </a:moveTo>
                 <a:lnTo>
-                  <a:pt x="2193798" y="1096899"/>
+                  <a:pt x="2315718" y="1157859"/>
                 </a:lnTo>
                 <a:lnTo>
-                  <a:pt x="2193798" y="0"/>
+                  <a:pt x="2315718" y="0"/>
                 </a:lnTo>
                 <a:lnTo>
                   <a:pt x="0" y="0"/>
@@ -10447,8 +10447,8 @@
         </p:nvSpPr>
         <p:spPr>
           <a:xfrm>
-            <a:off x="3778568" y="3484083"/>
-            <a:ext cx="1645348" cy="1645349"/>
+            <a:off x="3809048" y="3449031"/>
+            <a:ext cx="1736789" cy="1736789"/>
           </a:xfrm>
           <a:custGeom>
             <a:avLst/>
@@ -10457,15 +10457,15 @@
             <a:cxnLst/>
             <a:rect l="l" t="t" r="r" b="b"/>
             <a:pathLst>
-              <a:path w="1645348" h="1645349">
+              <a:path w="1736789" h="1736789">
                 <a:moveTo>
-                  <a:pt x="0" y="1645349"/>
+                  <a:pt x="0" y="1736789"/>
                 </a:moveTo>
                 <a:lnTo>
-                  <a:pt x="1645348" y="1645349"/>
+                  <a:pt x="1736789" y="1736789"/>
                 </a:lnTo>
                 <a:lnTo>
-                  <a:pt x="1645348" y="0"/>
+                  <a:pt x="1736789" y="0"/>
                 </a:lnTo>
                 <a:lnTo>
                   <a:pt x="0" y="0"/>
@@ -10488,8 +10488,8 @@
         </p:nvSpPr>
         <p:spPr>
           <a:xfrm flipV="1">
-            <a:off x="1036320" y="3100168"/>
-            <a:ext cx="0" cy="2029263"/>
+            <a:off x="914400" y="3043780"/>
+            <a:ext cx="0" cy="2142039"/>
           </a:xfrm>
           <a:prstGeom prst="line">
             <a:avLst/>
@@ -10511,8 +10511,8 @@
         </p:nvSpPr>
         <p:spPr>
           <a:xfrm flipV="1">
-            <a:off x="1584770" y="3100168"/>
-            <a:ext cx="0" cy="2029263"/>
+            <a:off x="1493330" y="3043780"/>
+            <a:ext cx="0" cy="2142039"/>
           </a:xfrm>
           <a:prstGeom prst="line">
             <a:avLst/>
@@ -10534,8 +10534,8 @@
         </p:nvSpPr>
         <p:spPr>
           <a:xfrm flipV="1">
-            <a:off x="2133219" y="3100168"/>
-            <a:ext cx="0" cy="2029263"/>
+            <a:off x="2072259" y="3043780"/>
+            <a:ext cx="0" cy="2142039"/>
           </a:xfrm>
           <a:prstGeom prst="line">
             <a:avLst/>
@@ -10557,8 +10557,8 @@
         </p:nvSpPr>
         <p:spPr>
           <a:xfrm flipV="1">
-            <a:off x="2681669" y="3100168"/>
-            <a:ext cx="0" cy="2029263"/>
+            <a:off x="2651189" y="3043780"/>
+            <a:ext cx="0" cy="2142039"/>
           </a:xfrm>
           <a:prstGeom prst="line">
             <a:avLst/>
@@ -10580,8 +10580,8 @@
         </p:nvSpPr>
         <p:spPr>
           <a:xfrm flipV="1">
-            <a:off x="3230118" y="3100168"/>
-            <a:ext cx="0" cy="2029263"/>
+            <a:off x="3230118" y="3043780"/>
+            <a:ext cx="0" cy="2142039"/>
           </a:xfrm>
           <a:prstGeom prst="line">
             <a:avLst/>
@@ -10603,8 +10603,8 @@
         </p:nvSpPr>
         <p:spPr>
           <a:xfrm flipV="1">
-            <a:off x="3778568" y="3100168"/>
-            <a:ext cx="0" cy="2029263"/>
+            <a:off x="3809048" y="3043780"/>
+            <a:ext cx="0" cy="2142039"/>
           </a:xfrm>
           <a:prstGeom prst="line">
             <a:avLst/>
@@ -10626,8 +10626,8 @@
         </p:nvSpPr>
         <p:spPr>
           <a:xfrm flipV="1">
-            <a:off x="4327017" y="3100168"/>
-            <a:ext cx="0" cy="2029263"/>
+            <a:off x="4387977" y="3043780"/>
+            <a:ext cx="0" cy="2142039"/>
           </a:xfrm>
           <a:prstGeom prst="line">
             <a:avLst/>
@@ -10649,8 +10649,8 @@
         </p:nvSpPr>
         <p:spPr>
           <a:xfrm flipV="1">
-            <a:off x="4875467" y="3100168"/>
-            <a:ext cx="0" cy="2029263"/>
+            <a:off x="4966907" y="3043780"/>
+            <a:ext cx="0" cy="2142039"/>
           </a:xfrm>
           <a:prstGeom prst="line">
             <a:avLst/>
@@ -10672,8 +10672,8 @@
         </p:nvSpPr>
         <p:spPr>
           <a:xfrm flipV="1">
-            <a:off x="5423916" y="3100168"/>
-            <a:ext cx="0" cy="2029263"/>
+            <a:off x="5545836" y="3043780"/>
+            <a:ext cx="0" cy="2142039"/>
           </a:xfrm>
           <a:prstGeom prst="line">
             <a:avLst/>
@@ -10695,8 +10695,8 @@
         </p:nvSpPr>
         <p:spPr>
           <a:xfrm>
-            <a:off x="1036320" y="5129432"/>
-            <a:ext cx="4387596" cy="0"/>
+            <a:off x="914400" y="5185820"/>
+            <a:ext cx="4631436" cy="0"/>
           </a:xfrm>
           <a:prstGeom prst="line">
             <a:avLst/>
@@ -10718,8 +10718,8 @@
         </p:nvSpPr>
         <p:spPr>
           <a:xfrm>
-            <a:off x="1036320" y="4580982"/>
-            <a:ext cx="4387596" cy="0"/>
+            <a:off x="914400" y="4606890"/>
+            <a:ext cx="4631436" cy="0"/>
           </a:xfrm>
           <a:prstGeom prst="line">
             <a:avLst/>
@@ -10741,8 +10741,8 @@
         </p:nvSpPr>
         <p:spPr>
           <a:xfrm>
-            <a:off x="1036320" y="4032533"/>
-            <a:ext cx="4387596" cy="0"/>
+            <a:off x="914400" y="4027961"/>
+            <a:ext cx="4631436" cy="0"/>
           </a:xfrm>
           <a:prstGeom prst="line">
             <a:avLst/>
@@ -10764,8 +10764,8 @@
         </p:nvSpPr>
         <p:spPr>
           <a:xfrm>
-            <a:off x="1036320" y="3484083"/>
-            <a:ext cx="4387596" cy="0"/>
+            <a:off x="914400" y="3449031"/>
+            <a:ext cx="4631436" cy="0"/>
           </a:xfrm>
           <a:prstGeom prst="line">
             <a:avLst/>
@@ -10787,8 +10787,8 @@
         </p:nvSpPr>
         <p:spPr>
           <a:xfrm>
-            <a:off x="1036320" y="4032533"/>
-            <a:ext cx="2193798" cy="1096899"/>
+            <a:off x="914400" y="4027961"/>
+            <a:ext cx="2315718" cy="1157859"/>
           </a:xfrm>
           <a:custGeom>
             <a:avLst/>
@@ -10797,15 +10797,15 @@
             <a:cxnLst/>
             <a:rect l="l" t="t" r="r" b="b"/>
             <a:pathLst>
-              <a:path w="2193798" h="1096899">
+              <a:path w="2315718" h="1157859">
                 <a:moveTo>
-                  <a:pt x="0" y="1096899"/>
+                  <a:pt x="0" y="1157859"/>
                 </a:moveTo>
                 <a:lnTo>
-                  <a:pt x="2193798" y="1096899"/>
+                  <a:pt x="2315718" y="1157859"/>
                 </a:lnTo>
                 <a:lnTo>
-                  <a:pt x="2193798" y="0"/>
+                  <a:pt x="2315718" y="0"/>
                 </a:lnTo>
                 <a:lnTo>
                   <a:pt x="0" y="0"/>
@@ -10831,8 +10831,8 @@
         </p:nvSpPr>
         <p:spPr>
           <a:xfrm>
-            <a:off x="3778568" y="3484083"/>
-            <a:ext cx="1645348" cy="1645349"/>
+            <a:off x="3809048" y="3449031"/>
+            <a:ext cx="1736789" cy="1736789"/>
           </a:xfrm>
           <a:custGeom>
             <a:avLst/>
@@ -10841,15 +10841,15 @@
             <a:cxnLst/>
             <a:rect l="l" t="t" r="r" b="b"/>
             <a:pathLst>
-              <a:path w="1645348" h="1645349">
+              <a:path w="1736789" h="1736789">
                 <a:moveTo>
-                  <a:pt x="0" y="1645349"/>
+                  <a:pt x="0" y="1736789"/>
                 </a:moveTo>
                 <a:lnTo>
-                  <a:pt x="1645348" y="1645349"/>
+                  <a:pt x="1736789" y="1736789"/>
                 </a:lnTo>
                 <a:lnTo>
-                  <a:pt x="1645348" y="0"/>
+                  <a:pt x="1736789" y="0"/>
                 </a:lnTo>
                 <a:lnTo>
                   <a:pt x="0" y="0"/>
@@ -10875,7 +10875,7 @@
         </p:nvSpPr>
         <p:spPr>
           <a:xfrm>
-            <a:off x="1036320" y="4900832"/>
+            <a:off x="914400" y="4957220"/>
             <a:ext cx="228600" cy="228600"/>
           </a:xfrm>
           <a:custGeom>
@@ -10915,7 +10915,7 @@
         </p:nvSpPr>
         <p:spPr>
           <a:xfrm>
-            <a:off x="3001518" y="4900832"/>
+            <a:off x="3001518" y="4957220"/>
             <a:ext cx="228600" cy="228600"/>
           </a:xfrm>
           <a:custGeom>
@@ -10955,7 +10955,7 @@
         </p:nvSpPr>
         <p:spPr>
           <a:xfrm>
-            <a:off x="3001518" y="4032533"/>
+            <a:off x="3001518" y="4027961"/>
             <a:ext cx="228600" cy="228600"/>
           </a:xfrm>
           <a:custGeom>
@@ -10995,7 +10995,7 @@
         </p:nvSpPr>
         <p:spPr>
           <a:xfrm>
-            <a:off x="1036320" y="4032533"/>
+            <a:off x="914400" y="4027961"/>
             <a:ext cx="228600" cy="228600"/>
           </a:xfrm>
           <a:custGeom>
@@ -11035,7 +11035,7 @@
         </p:nvSpPr>
         <p:spPr>
           <a:xfrm>
-            <a:off x="3778568" y="4900832"/>
+            <a:off x="3809048" y="4957220"/>
             <a:ext cx="228600" cy="228600"/>
           </a:xfrm>
           <a:custGeom>
@@ -11075,7 +11075,7 @@
         </p:nvSpPr>
         <p:spPr>
           <a:xfrm>
-            <a:off x="5195316" y="4900832"/>
+            <a:off x="5317236" y="4957220"/>
             <a:ext cx="228600" cy="228600"/>
           </a:xfrm>
           <a:custGeom>
@@ -11115,7 +11115,7 @@
         </p:nvSpPr>
         <p:spPr>
           <a:xfrm>
-            <a:off x="5195316" y="3484083"/>
+            <a:off x="5317236" y="3449031"/>
             <a:ext cx="228600" cy="228600"/>
           </a:xfrm>
           <a:custGeom>
@@ -11155,7 +11155,7 @@
         </p:nvSpPr>
         <p:spPr>
           <a:xfrm>
-            <a:off x="3778568" y="3484083"/>
+            <a:off x="3809048" y="3449031"/>
             <a:ext cx="228600" cy="228600"/>
           </a:xfrm>
           <a:custGeom>
@@ -11195,8 +11195,8 @@
         </p:nvSpPr>
         <p:spPr>
           <a:xfrm>
-            <a:off x="1831467" y="5198012"/>
-            <a:ext cx="603504" cy="381000"/>
+            <a:off x="1767459" y="5269640"/>
+            <a:ext cx="609600" cy="381000"/>
           </a:xfrm>
           <a:prstGeom prst="rect">
             <a:avLst/>
@@ -11234,8 +11234,8 @@
         </p:nvSpPr>
         <p:spPr>
           <a:xfrm>
-            <a:off x="323088" y="4390482"/>
-            <a:ext cx="603504" cy="381000"/>
+            <a:off x="274320" y="4416390"/>
+            <a:ext cx="609600" cy="381000"/>
           </a:xfrm>
           <a:prstGeom prst="rect">
             <a:avLst/>
@@ -11273,8 +11273,8 @@
         </p:nvSpPr>
         <p:spPr>
           <a:xfrm>
-            <a:off x="4299490" y="5198012"/>
-            <a:ext cx="603504" cy="381000"/>
+            <a:off x="4372642" y="5269640"/>
+            <a:ext cx="609600" cy="381000"/>
           </a:xfrm>
           <a:prstGeom prst="rect">
             <a:avLst/>
@@ -11312,8 +11312,8 @@
         </p:nvSpPr>
         <p:spPr>
           <a:xfrm>
-            <a:off x="5533644" y="4116257"/>
-            <a:ext cx="603504" cy="381000"/>
+            <a:off x="5576316" y="4126925"/>
+            <a:ext cx="609600" cy="381000"/>
           </a:xfrm>
           <a:prstGeom prst="rect">
             <a:avLst/>
@@ -11351,7 +11351,7 @@
         </p:nvSpPr>
         <p:spPr>
           <a:xfrm>
-            <a:off x="1480947" y="2909668"/>
+            <a:off x="1419987" y="2853280"/>
             <a:ext cx="1304544" cy="381000"/>
           </a:xfrm>
           <a:prstGeom prst="rect">
@@ -11390,7 +11390,7 @@
         </p:nvSpPr>
         <p:spPr>
           <a:xfrm>
-            <a:off x="3948970" y="2909668"/>
+            <a:off x="4025170" y="2853280"/>
             <a:ext cx="1304544" cy="381000"/>
           </a:xfrm>
           <a:prstGeom prst="rect">
